--- a/CrunchPlus_Final_Market_Entry_Strategy.pptx
+++ b/CrunchPlus_Final_Market_Entry_Strategy.pptx
@@ -5,16 +5,16 @@
     <p:sldMasterId id="2147483648" r:id="rId1"/>
   </p:sldMasterIdLst>
   <p:sldIdLst>
-    <p:sldId id="256" r:id="rId7"/>
-    <p:sldId id="257" r:id="rId8"/>
-    <p:sldId id="258" r:id="rId9"/>
-    <p:sldId id="259" r:id="rId10"/>
-    <p:sldId id="260" r:id="rId11"/>
-    <p:sldId id="261" r:id="rId12"/>
-    <p:sldId id="262" r:id="rId13"/>
-    <p:sldId id="263" r:id="rId14"/>
+    <p:sldId id="256" r:id="rId2"/>
+    <p:sldId id="257" r:id="rId3"/>
+    <p:sldId id="258" r:id="rId4"/>
+    <p:sldId id="259" r:id="rId5"/>
+    <p:sldId id="260" r:id="rId6"/>
+    <p:sldId id="261" r:id="rId7"/>
+    <p:sldId id="262" r:id="rId8"/>
+    <p:sldId id="263" r:id="rId9"/>
   </p:sldIdLst>
-  <p:sldSz cx="12191695" cy="6858000" type="screen4x3"/>
+  <p:sldSz cx="12192000" cy="6858000"/>
   <p:notesSz cx="6858000" cy="9144000"/>
   <p:defaultTextStyle>
     <a:defPPr>
@@ -111,6 +111,22 @@
       </a:defRPr>
     </a:lvl9pPr>
   </p:defaultTextStyle>
+  <p:extLst>
+    <p:ext uri="{EFAFB233-063F-42B5-8137-9DF3F51BA10A}">
+      <p15:sldGuideLst xmlns:p15="http://schemas.microsoft.com/office/powerpoint/2012/main">
+        <p15:guide id="1" orient="horz" pos="2160">
+          <p15:clr>
+            <a:srgbClr val="A4A3A4"/>
+          </p15:clr>
+        </p15:guide>
+        <p15:guide id="2" pos="2880">
+          <p15:clr>
+            <a:srgbClr val="A4A3A4"/>
+          </p15:clr>
+        </p15:guide>
+      </p15:sldGuideLst>
+    </p:ext>
+  </p:extLst>
 </p:presentation>
 </file>
 
@@ -152,10 +168,9 @@
           <a:lstStyle/>
           <a:p>
             <a:r>
-              <a:rPr lang="en-US" smtClean="0"/>
+              <a:rPr lang="en-US"/>
               <a:t>Click to edit Master title style</a:t>
             </a:r>
-            <a:endParaRPr lang="en-US"/>
           </a:p>
         </p:txBody>
       </p:sp>
@@ -271,10 +286,9 @@
           </a:lstStyle>
           <a:p>
             <a:r>
-              <a:rPr lang="en-US" smtClean="0"/>
+              <a:rPr lang="en-US"/>
               <a:t>Click to edit Master subtitle style</a:t>
             </a:r>
-            <a:endParaRPr lang="en-US"/>
           </a:p>
         </p:txBody>
       </p:sp>
@@ -295,7 +309,7 @@
           <a:p>
             <a:fld id="{5BCAD085-E8A6-8845-BD4E-CB4CCA059FC4}" type="datetimeFigureOut">
               <a:rPr lang="en-US" smtClean="0"/>
-              <a:t>1/27/13</a:t>
+              <a:t>9/19/2026</a:t>
             </a:fld>
             <a:endParaRPr lang="en-US"/>
           </a:p>
@@ -389,10 +403,9 @@
           <a:lstStyle/>
           <a:p>
             <a:r>
-              <a:rPr lang="en-US" smtClean="0"/>
+              <a:rPr lang="en-US"/>
               <a:t>Click to edit Master title style</a:t>
             </a:r>
-            <a:endParaRPr lang="en-US"/>
           </a:p>
         </p:txBody>
       </p:sp>
@@ -413,38 +426,37 @@
           <a:p>
             <a:pPr lvl="0"/>
             <a:r>
-              <a:rPr lang="en-US" smtClean="0"/>
+              <a:rPr lang="en-US"/>
               <a:t>Click to edit Master text styles</a:t>
             </a:r>
           </a:p>
           <a:p>
             <a:pPr lvl="1"/>
             <a:r>
-              <a:rPr lang="en-US" smtClean="0"/>
+              <a:rPr lang="en-US"/>
               <a:t>Second level</a:t>
             </a:r>
           </a:p>
           <a:p>
             <a:pPr lvl="2"/>
             <a:r>
-              <a:rPr lang="en-US" smtClean="0"/>
+              <a:rPr lang="en-US"/>
               <a:t>Third level</a:t>
             </a:r>
           </a:p>
           <a:p>
             <a:pPr lvl="3"/>
             <a:r>
-              <a:rPr lang="en-US" smtClean="0"/>
+              <a:rPr lang="en-US"/>
               <a:t>Fourth level</a:t>
             </a:r>
           </a:p>
           <a:p>
             <a:pPr lvl="4"/>
             <a:r>
-              <a:rPr lang="en-US" smtClean="0"/>
+              <a:rPr lang="en-US"/>
               <a:t>Fifth level</a:t>
             </a:r>
-            <a:endParaRPr lang="en-US"/>
           </a:p>
         </p:txBody>
       </p:sp>
@@ -465,7 +477,7 @@
           <a:p>
             <a:fld id="{5BCAD085-E8A6-8845-BD4E-CB4CCA059FC4}" type="datetimeFigureOut">
               <a:rPr lang="en-US" smtClean="0"/>
-              <a:t>1/27/13</a:t>
+              <a:t>9/19/2026</a:t>
             </a:fld>
             <a:endParaRPr lang="en-US"/>
           </a:p>
@@ -564,10 +576,9 @@
           <a:lstStyle/>
           <a:p>
             <a:r>
-              <a:rPr lang="en-US" smtClean="0"/>
+              <a:rPr lang="en-US"/>
               <a:t>Click to edit Master title style</a:t>
             </a:r>
-            <a:endParaRPr lang="en-US"/>
           </a:p>
         </p:txBody>
       </p:sp>
@@ -593,38 +604,37 @@
           <a:p>
             <a:pPr lvl="0"/>
             <a:r>
-              <a:rPr lang="en-US" smtClean="0"/>
+              <a:rPr lang="en-US"/>
               <a:t>Click to edit Master text styles</a:t>
             </a:r>
           </a:p>
           <a:p>
             <a:pPr lvl="1"/>
             <a:r>
-              <a:rPr lang="en-US" smtClean="0"/>
+              <a:rPr lang="en-US"/>
               <a:t>Second level</a:t>
             </a:r>
           </a:p>
           <a:p>
             <a:pPr lvl="2"/>
             <a:r>
-              <a:rPr lang="en-US" smtClean="0"/>
+              <a:rPr lang="en-US"/>
               <a:t>Third level</a:t>
             </a:r>
           </a:p>
           <a:p>
             <a:pPr lvl="3"/>
             <a:r>
-              <a:rPr lang="en-US" smtClean="0"/>
+              <a:rPr lang="en-US"/>
               <a:t>Fourth level</a:t>
             </a:r>
           </a:p>
           <a:p>
             <a:pPr lvl="4"/>
             <a:r>
-              <a:rPr lang="en-US" smtClean="0"/>
+              <a:rPr lang="en-US"/>
               <a:t>Fifth level</a:t>
             </a:r>
-            <a:endParaRPr lang="en-US"/>
           </a:p>
         </p:txBody>
       </p:sp>
@@ -645,7 +655,7 @@
           <a:p>
             <a:fld id="{5BCAD085-E8A6-8845-BD4E-CB4CCA059FC4}" type="datetimeFigureOut">
               <a:rPr lang="en-US" smtClean="0"/>
-              <a:t>1/27/13</a:t>
+              <a:t>9/19/2026</a:t>
             </a:fld>
             <a:endParaRPr lang="en-US"/>
           </a:p>
@@ -739,10 +749,9 @@
           <a:lstStyle/>
           <a:p>
             <a:r>
-              <a:rPr lang="en-US" smtClean="0"/>
+              <a:rPr lang="en-US"/>
               <a:t>Click to edit Master title style</a:t>
             </a:r>
-            <a:endParaRPr lang="en-US"/>
           </a:p>
         </p:txBody>
       </p:sp>
@@ -763,38 +772,37 @@
           <a:p>
             <a:pPr lvl="0"/>
             <a:r>
-              <a:rPr lang="en-US" smtClean="0"/>
+              <a:rPr lang="en-US"/>
               <a:t>Click to edit Master text styles</a:t>
             </a:r>
           </a:p>
           <a:p>
             <a:pPr lvl="1"/>
             <a:r>
-              <a:rPr lang="en-US" smtClean="0"/>
+              <a:rPr lang="en-US"/>
               <a:t>Second level</a:t>
             </a:r>
           </a:p>
           <a:p>
             <a:pPr lvl="2"/>
             <a:r>
-              <a:rPr lang="en-US" smtClean="0"/>
+              <a:rPr lang="en-US"/>
               <a:t>Third level</a:t>
             </a:r>
           </a:p>
           <a:p>
             <a:pPr lvl="3"/>
             <a:r>
-              <a:rPr lang="en-US" smtClean="0"/>
+              <a:rPr lang="en-US"/>
               <a:t>Fourth level</a:t>
             </a:r>
           </a:p>
           <a:p>
             <a:pPr lvl="4"/>
             <a:r>
-              <a:rPr lang="en-US" smtClean="0"/>
+              <a:rPr lang="en-US"/>
               <a:t>Fifth level</a:t>
             </a:r>
-            <a:endParaRPr lang="en-US"/>
           </a:p>
         </p:txBody>
       </p:sp>
@@ -815,7 +823,7 @@
           <a:p>
             <a:fld id="{5BCAD085-E8A6-8845-BD4E-CB4CCA059FC4}" type="datetimeFigureOut">
               <a:rPr lang="en-US" smtClean="0"/>
-              <a:t>1/27/13</a:t>
+              <a:t>9/19/2026</a:t>
             </a:fld>
             <a:endParaRPr lang="en-US"/>
           </a:p>
@@ -918,10 +926,9 @@
           </a:lstStyle>
           <a:p>
             <a:r>
-              <a:rPr lang="en-US" smtClean="0"/>
+              <a:rPr lang="en-US"/>
               <a:t>Click to edit Master title style</a:t>
             </a:r>
-            <a:endParaRPr lang="en-US"/>
           </a:p>
         </p:txBody>
       </p:sp>
@@ -1038,7 +1045,7 @@
           <a:p>
             <a:pPr lvl="0"/>
             <a:r>
-              <a:rPr lang="en-US" smtClean="0"/>
+              <a:rPr lang="en-US"/>
               <a:t>Click to edit Master text styles</a:t>
             </a:r>
           </a:p>
@@ -1061,7 +1068,7 @@
           <a:p>
             <a:fld id="{5BCAD085-E8A6-8845-BD4E-CB4CCA059FC4}" type="datetimeFigureOut">
               <a:rPr lang="en-US" smtClean="0"/>
-              <a:t>1/27/13</a:t>
+              <a:t>9/19/2026</a:t>
             </a:fld>
             <a:endParaRPr lang="en-US"/>
           </a:p>
@@ -1155,10 +1162,9 @@
           <a:lstStyle/>
           <a:p>
             <a:r>
-              <a:rPr lang="en-US" smtClean="0"/>
+              <a:rPr lang="en-US"/>
               <a:t>Click to edit Master title style</a:t>
             </a:r>
-            <a:endParaRPr lang="en-US"/>
           </a:p>
         </p:txBody>
       </p:sp>
@@ -1212,38 +1218,37 @@
           <a:p>
             <a:pPr lvl="0"/>
             <a:r>
-              <a:rPr lang="en-US" smtClean="0"/>
+              <a:rPr lang="en-US"/>
               <a:t>Click to edit Master text styles</a:t>
             </a:r>
           </a:p>
           <a:p>
             <a:pPr lvl="1"/>
             <a:r>
-              <a:rPr lang="en-US" smtClean="0"/>
+              <a:rPr lang="en-US"/>
               <a:t>Second level</a:t>
             </a:r>
           </a:p>
           <a:p>
             <a:pPr lvl="2"/>
             <a:r>
-              <a:rPr lang="en-US" smtClean="0"/>
+              <a:rPr lang="en-US"/>
               <a:t>Third level</a:t>
             </a:r>
           </a:p>
           <a:p>
             <a:pPr lvl="3"/>
             <a:r>
-              <a:rPr lang="en-US" smtClean="0"/>
+              <a:rPr lang="en-US"/>
               <a:t>Fourth level</a:t>
             </a:r>
           </a:p>
           <a:p>
             <a:pPr lvl="4"/>
             <a:r>
-              <a:rPr lang="en-US" smtClean="0"/>
+              <a:rPr lang="en-US"/>
               <a:t>Fifth level</a:t>
             </a:r>
-            <a:endParaRPr lang="en-US"/>
           </a:p>
         </p:txBody>
       </p:sp>
@@ -1297,38 +1302,37 @@
           <a:p>
             <a:pPr lvl="0"/>
             <a:r>
-              <a:rPr lang="en-US" smtClean="0"/>
+              <a:rPr lang="en-US"/>
               <a:t>Click to edit Master text styles</a:t>
             </a:r>
           </a:p>
           <a:p>
             <a:pPr lvl="1"/>
             <a:r>
-              <a:rPr lang="en-US" smtClean="0"/>
+              <a:rPr lang="en-US"/>
               <a:t>Second level</a:t>
             </a:r>
           </a:p>
           <a:p>
             <a:pPr lvl="2"/>
             <a:r>
-              <a:rPr lang="en-US" smtClean="0"/>
+              <a:rPr lang="en-US"/>
               <a:t>Third level</a:t>
             </a:r>
           </a:p>
           <a:p>
             <a:pPr lvl="3"/>
             <a:r>
-              <a:rPr lang="en-US" smtClean="0"/>
+              <a:rPr lang="en-US"/>
               <a:t>Fourth level</a:t>
             </a:r>
           </a:p>
           <a:p>
             <a:pPr lvl="4"/>
             <a:r>
-              <a:rPr lang="en-US" smtClean="0"/>
+              <a:rPr lang="en-US"/>
               <a:t>Fifth level</a:t>
             </a:r>
-            <a:endParaRPr lang="en-US"/>
           </a:p>
         </p:txBody>
       </p:sp>
@@ -1349,7 +1353,7 @@
           <a:p>
             <a:fld id="{5BCAD085-E8A6-8845-BD4E-CB4CCA059FC4}" type="datetimeFigureOut">
               <a:rPr lang="en-US" smtClean="0"/>
-              <a:t>1/27/13</a:t>
+              <a:t>9/19/2026</a:t>
             </a:fld>
             <a:endParaRPr lang="en-US"/>
           </a:p>
@@ -1447,10 +1451,9 @@
           </a:lstStyle>
           <a:p>
             <a:r>
-              <a:rPr lang="en-US" smtClean="0"/>
+              <a:rPr lang="en-US"/>
               <a:t>Click to edit Master title style</a:t>
             </a:r>
-            <a:endParaRPr lang="en-US"/>
           </a:p>
         </p:txBody>
       </p:sp>
@@ -1513,7 +1516,7 @@
           <a:p>
             <a:pPr lvl="0"/>
             <a:r>
-              <a:rPr lang="en-US" smtClean="0"/>
+              <a:rPr lang="en-US"/>
               <a:t>Click to edit Master text styles</a:t>
             </a:r>
           </a:p>
@@ -1569,38 +1572,37 @@
           <a:p>
             <a:pPr lvl="0"/>
             <a:r>
-              <a:rPr lang="en-US" smtClean="0"/>
+              <a:rPr lang="en-US"/>
               <a:t>Click to edit Master text styles</a:t>
             </a:r>
           </a:p>
           <a:p>
             <a:pPr lvl="1"/>
             <a:r>
-              <a:rPr lang="en-US" smtClean="0"/>
+              <a:rPr lang="en-US"/>
               <a:t>Second level</a:t>
             </a:r>
           </a:p>
           <a:p>
             <a:pPr lvl="2"/>
             <a:r>
-              <a:rPr lang="en-US" smtClean="0"/>
+              <a:rPr lang="en-US"/>
               <a:t>Third level</a:t>
             </a:r>
           </a:p>
           <a:p>
             <a:pPr lvl="3"/>
             <a:r>
-              <a:rPr lang="en-US" smtClean="0"/>
+              <a:rPr lang="en-US"/>
               <a:t>Fourth level</a:t>
             </a:r>
           </a:p>
           <a:p>
             <a:pPr lvl="4"/>
             <a:r>
-              <a:rPr lang="en-US" smtClean="0"/>
+              <a:rPr lang="en-US"/>
               <a:t>Fifth level</a:t>
             </a:r>
-            <a:endParaRPr lang="en-US"/>
           </a:p>
         </p:txBody>
       </p:sp>
@@ -1663,7 +1665,7 @@
           <a:p>
             <a:pPr lvl="0"/>
             <a:r>
-              <a:rPr lang="en-US" smtClean="0"/>
+              <a:rPr lang="en-US"/>
               <a:t>Click to edit Master text styles</a:t>
             </a:r>
           </a:p>
@@ -1719,38 +1721,37 @@
           <a:p>
             <a:pPr lvl="0"/>
             <a:r>
-              <a:rPr lang="en-US" smtClean="0"/>
+              <a:rPr lang="en-US"/>
               <a:t>Click to edit Master text styles</a:t>
             </a:r>
           </a:p>
           <a:p>
             <a:pPr lvl="1"/>
             <a:r>
-              <a:rPr lang="en-US" smtClean="0"/>
+              <a:rPr lang="en-US"/>
               <a:t>Second level</a:t>
             </a:r>
           </a:p>
           <a:p>
             <a:pPr lvl="2"/>
             <a:r>
-              <a:rPr lang="en-US" smtClean="0"/>
+              <a:rPr lang="en-US"/>
               <a:t>Third level</a:t>
             </a:r>
           </a:p>
           <a:p>
             <a:pPr lvl="3"/>
             <a:r>
-              <a:rPr lang="en-US" smtClean="0"/>
+              <a:rPr lang="en-US"/>
               <a:t>Fourth level</a:t>
             </a:r>
           </a:p>
           <a:p>
             <a:pPr lvl="4"/>
             <a:r>
-              <a:rPr lang="en-US" smtClean="0"/>
+              <a:rPr lang="en-US"/>
               <a:t>Fifth level</a:t>
             </a:r>
-            <a:endParaRPr lang="en-US"/>
           </a:p>
         </p:txBody>
       </p:sp>
@@ -1771,7 +1772,7 @@
           <a:p>
             <a:fld id="{5BCAD085-E8A6-8845-BD4E-CB4CCA059FC4}" type="datetimeFigureOut">
               <a:rPr lang="en-US" smtClean="0"/>
-              <a:t>1/27/13</a:t>
+              <a:t>9/19/2026</a:t>
             </a:fld>
             <a:endParaRPr lang="en-US"/>
           </a:p>
@@ -1865,10 +1866,9 @@
           <a:lstStyle/>
           <a:p>
             <a:r>
-              <a:rPr lang="en-US" smtClean="0"/>
+              <a:rPr lang="en-US"/>
               <a:t>Click to edit Master title style</a:t>
             </a:r>
-            <a:endParaRPr lang="en-US"/>
           </a:p>
         </p:txBody>
       </p:sp>
@@ -1889,7 +1889,7 @@
           <a:p>
             <a:fld id="{5BCAD085-E8A6-8845-BD4E-CB4CCA059FC4}" type="datetimeFigureOut">
               <a:rPr lang="en-US" smtClean="0"/>
-              <a:t>1/27/13</a:t>
+              <a:t>9/19/2026</a:t>
             </a:fld>
             <a:endParaRPr lang="en-US"/>
           </a:p>
@@ -1984,7 +1984,7 @@
           <a:p>
             <a:fld id="{5BCAD085-E8A6-8845-BD4E-CB4CCA059FC4}" type="datetimeFigureOut">
               <a:rPr lang="en-US" smtClean="0"/>
-              <a:t>1/27/13</a:t>
+              <a:t>9/19/2026</a:t>
             </a:fld>
             <a:endParaRPr lang="en-US"/>
           </a:p>
@@ -2087,10 +2087,9 @@
           </a:lstStyle>
           <a:p>
             <a:r>
-              <a:rPr lang="en-US" smtClean="0"/>
+              <a:rPr lang="en-US"/>
               <a:t>Click to edit Master title style</a:t>
             </a:r>
-            <a:endParaRPr lang="en-US"/>
           </a:p>
         </p:txBody>
       </p:sp>
@@ -2144,38 +2143,37 @@
           <a:p>
             <a:pPr lvl="0"/>
             <a:r>
-              <a:rPr lang="en-US" smtClean="0"/>
+              <a:rPr lang="en-US"/>
               <a:t>Click to edit Master text styles</a:t>
             </a:r>
           </a:p>
           <a:p>
             <a:pPr lvl="1"/>
             <a:r>
-              <a:rPr lang="en-US" smtClean="0"/>
+              <a:rPr lang="en-US"/>
               <a:t>Second level</a:t>
             </a:r>
           </a:p>
           <a:p>
             <a:pPr lvl="2"/>
             <a:r>
-              <a:rPr lang="en-US" smtClean="0"/>
+              <a:rPr lang="en-US"/>
               <a:t>Third level</a:t>
             </a:r>
           </a:p>
           <a:p>
             <a:pPr lvl="3"/>
             <a:r>
-              <a:rPr lang="en-US" smtClean="0"/>
+              <a:rPr lang="en-US"/>
               <a:t>Fourth level</a:t>
             </a:r>
           </a:p>
           <a:p>
             <a:pPr lvl="4"/>
             <a:r>
-              <a:rPr lang="en-US" smtClean="0"/>
+              <a:rPr lang="en-US"/>
               <a:t>Fifth level</a:t>
             </a:r>
-            <a:endParaRPr lang="en-US"/>
           </a:p>
         </p:txBody>
       </p:sp>
@@ -2238,7 +2236,7 @@
           <a:p>
             <a:pPr lvl="0"/>
             <a:r>
-              <a:rPr lang="en-US" smtClean="0"/>
+              <a:rPr lang="en-US"/>
               <a:t>Click to edit Master text styles</a:t>
             </a:r>
           </a:p>
@@ -2261,7 +2259,7 @@
           <a:p>
             <a:fld id="{5BCAD085-E8A6-8845-BD4E-CB4CCA059FC4}" type="datetimeFigureOut">
               <a:rPr lang="en-US" smtClean="0"/>
-              <a:t>1/27/13</a:t>
+              <a:t>9/19/2026</a:t>
             </a:fld>
             <a:endParaRPr lang="en-US"/>
           </a:p>
@@ -2364,10 +2362,9 @@
           </a:lstStyle>
           <a:p>
             <a:r>
-              <a:rPr lang="en-US" smtClean="0"/>
+              <a:rPr lang="en-US"/>
               <a:t>Click to edit Master title style</a:t>
             </a:r>
-            <a:endParaRPr lang="en-US"/>
           </a:p>
         </p:txBody>
       </p:sp>
@@ -2491,7 +2488,7 @@
           <a:p>
             <a:pPr lvl="0"/>
             <a:r>
-              <a:rPr lang="en-US" smtClean="0"/>
+              <a:rPr lang="en-US"/>
               <a:t>Click to edit Master text styles</a:t>
             </a:r>
           </a:p>
@@ -2514,7 +2511,7 @@
           <a:p>
             <a:fld id="{5BCAD085-E8A6-8845-BD4E-CB4CCA059FC4}" type="datetimeFigureOut">
               <a:rPr lang="en-US" smtClean="0"/>
-              <a:t>1/27/13</a:t>
+              <a:t>9/19/2026</a:t>
             </a:fld>
             <a:endParaRPr lang="en-US"/>
           </a:p>
@@ -2623,10 +2620,9 @@
           <a:lstStyle/>
           <a:p>
             <a:r>
-              <a:rPr lang="en-US" smtClean="0"/>
+              <a:rPr lang="en-US"/>
               <a:t>Click to edit Master title style</a:t>
             </a:r>
-            <a:endParaRPr lang="en-US"/>
           </a:p>
         </p:txBody>
       </p:sp>
@@ -2657,38 +2653,37 @@
           <a:p>
             <a:pPr lvl="0"/>
             <a:r>
-              <a:rPr lang="en-US" smtClean="0"/>
+              <a:rPr lang="en-US"/>
               <a:t>Click to edit Master text styles</a:t>
             </a:r>
           </a:p>
           <a:p>
             <a:pPr lvl="1"/>
             <a:r>
-              <a:rPr lang="en-US" smtClean="0"/>
+              <a:rPr lang="en-US"/>
               <a:t>Second level</a:t>
             </a:r>
           </a:p>
           <a:p>
             <a:pPr lvl="2"/>
             <a:r>
-              <a:rPr lang="en-US" smtClean="0"/>
+              <a:rPr lang="en-US"/>
               <a:t>Third level</a:t>
             </a:r>
           </a:p>
           <a:p>
             <a:pPr lvl="3"/>
             <a:r>
-              <a:rPr lang="en-US" smtClean="0"/>
+              <a:rPr lang="en-US"/>
               <a:t>Fourth level</a:t>
             </a:r>
           </a:p>
           <a:p>
             <a:pPr lvl="4"/>
             <a:r>
-              <a:rPr lang="en-US" smtClean="0"/>
+              <a:rPr lang="en-US"/>
               <a:t>Fifth level</a:t>
             </a:r>
-            <a:endParaRPr lang="en-US"/>
           </a:p>
         </p:txBody>
       </p:sp>
@@ -2727,7 +2722,7 @@
           <a:p>
             <a:fld id="{5BCAD085-E8A6-8845-BD4E-CB4CCA059FC4}" type="datetimeFigureOut">
               <a:rPr lang="en-US" smtClean="0"/>
-              <a:t>1/27/13</a:t>
+              <a:t>9/19/2026</a:t>
             </a:fld>
             <a:endParaRPr lang="en-US"/>
           </a:p>
@@ -3086,7 +3081,7 @@
 </file>
 
 <file path=ppt/slides/slide1.xml><?xml version="1.0" encoding="utf-8"?>
-<p:sld xmlns:a="http://schemas.openxmlformats.org/drawingml/2006/main" xmlns:p="http://schemas.openxmlformats.org/presentationml/2006/main" xmlns:r="http://schemas.openxmlformats.org/officeDocument/2006/relationships">
+<p:sld xmlns:a="http://schemas.openxmlformats.org/drawingml/2006/main" xmlns:r="http://schemas.openxmlformats.org/officeDocument/2006/relationships" xmlns:p="http://schemas.openxmlformats.org/presentationml/2006/main">
   <p:cSld>
     <p:bg>
       <p:bgPr>
@@ -3102,7 +3097,14 @@
         <p:cNvGrpSpPr/>
         <p:nvPr/>
       </p:nvGrpSpPr>
-      <p:grpSpPr/>
+      <p:grpSpPr>
+        <a:xfrm>
+          <a:off x="0" y="0"/>
+          <a:ext cx="0" cy="0"/>
+          <a:chOff x="0" y="0"/>
+          <a:chExt cx="0" cy="0"/>
+        </a:xfrm>
+      </p:grpSpPr>
       <p:sp>
         <p:nvSpPr>
           <p:cNvPr id="2" name="TextBox 1"/>
@@ -3251,6 +3253,7 @@
           <a:lstStyle/>
           <a:p>
             <a:pPr algn="ctr"/>
+            <a:endParaRPr/>
           </a:p>
         </p:txBody>
       </p:sp>
@@ -3366,6 +3369,7 @@
           <a:lstStyle/>
           <a:p>
             <a:pPr algn="ctr"/>
+            <a:endParaRPr/>
           </a:p>
         </p:txBody>
       </p:sp>
@@ -3482,6 +3486,7 @@
           <a:lstStyle/>
           <a:p>
             <a:pPr algn="ctr"/>
+            <a:endParaRPr/>
           </a:p>
         </p:txBody>
       </p:sp>
@@ -3580,7 +3585,7 @@
           <a:p>
             <a:pPr algn="l"/>
             <a:r>
-              <a:rPr sz="900" b="0">
+              <a:rPr sz="900" b="0" dirty="0">
                 <a:solidFill>
                   <a:srgbClr val="5C6366"/>
                 </a:solidFill>
@@ -3622,6 +3627,48 @@
                 <a:latin typeface="Aptos"/>
               </a:rPr>
               <a:t>01</a:t>
+            </a:r>
+          </a:p>
+        </p:txBody>
+      </p:sp>
+      <p:sp>
+        <p:nvSpPr>
+          <p:cNvPr id="16" name="TextBox 15">
+            <a:extLst>
+              <a:ext uri="{FF2B5EF4-FFF2-40B4-BE49-F238E27FC236}">
+                <a16:creationId xmlns:a16="http://schemas.microsoft.com/office/drawing/2014/main" id="{3C4EDCAB-4D88-C798-4812-7F7DE416C4FE}"/>
+              </a:ext>
+            </a:extLst>
+          </p:cNvPr>
+          <p:cNvSpPr txBox="1"/>
+          <p:nvPr/>
+        </p:nvSpPr>
+        <p:spPr>
+          <a:xfrm>
+            <a:off x="850392" y="4608576"/>
+            <a:ext cx="4157472" cy="646331"/>
+          </a:xfrm>
+          <a:prstGeom prst="rect">
+            <a:avLst/>
+          </a:prstGeom>
+          <a:noFill/>
+        </p:spPr>
+        <p:txBody>
+          <a:bodyPr wrap="square" rtlCol="0">
+            <a:spAutoFit/>
+          </a:bodyPr>
+          <a:lstStyle/>
+          <a:p>
+            <a:r>
+              <a:rPr lang="en-IN" dirty="0"/>
+              <a:t>By</a:t>
+            </a:r>
+            <a:br>
+              <a:rPr lang="en-IN" dirty="0"/>
+            </a:br>
+            <a:r>
+              <a:rPr lang="en-IN" dirty="0"/>
+              <a:t>Mahesh Singh Chauhan</a:t>
             </a:r>
           </a:p>
         </p:txBody>
@@ -3635,7 +3682,7 @@
 </file>
 
 <file path=ppt/slides/slide2.xml><?xml version="1.0" encoding="utf-8"?>
-<p:sld xmlns:a="http://schemas.openxmlformats.org/drawingml/2006/main" xmlns:p="http://schemas.openxmlformats.org/presentationml/2006/main" xmlns:r="http://schemas.openxmlformats.org/officeDocument/2006/relationships">
+<p:sld xmlns:a="http://schemas.openxmlformats.org/drawingml/2006/main" xmlns:r="http://schemas.openxmlformats.org/officeDocument/2006/relationships" xmlns:p="http://schemas.openxmlformats.org/presentationml/2006/main">
   <p:cSld>
     <p:bg>
       <p:bgPr>
@@ -3651,7 +3698,14 @@
         <p:cNvGrpSpPr/>
         <p:nvPr/>
       </p:nvGrpSpPr>
-      <p:grpSpPr/>
+      <p:grpSpPr>
+        <a:xfrm>
+          <a:off x="0" y="0"/>
+          <a:ext cx="0" cy="0"/>
+          <a:chOff x="0" y="0"/>
+          <a:chExt cx="0" cy="0"/>
+        </a:xfrm>
+      </p:grpSpPr>
       <p:sp>
         <p:nvSpPr>
           <p:cNvPr id="2" name="TextBox 1"/>
@@ -3696,22 +3750,22 @@
         <p:spPr>
           <a:xfrm>
             <a:off x="594360" y="621792"/>
-            <a:ext cx="10972800" cy="594360"/>
-          </a:xfrm>
-          <a:prstGeom prst="rect">
-            <a:avLst/>
-          </a:prstGeom>
-          <a:noFill/>
-        </p:spPr>
-        <p:txBody>
-          <a:bodyPr wrap="square">
-            <a:spAutoFit/>
-          </a:bodyPr>
-          <a:lstStyle/>
-          <a:p>
-            <a:pPr algn="l"/>
-            <a:r>
-              <a:rPr sz="2600" b="1">
+            <a:ext cx="11597640" cy="892552"/>
+          </a:xfrm>
+          <a:prstGeom prst="rect">
+            <a:avLst/>
+          </a:prstGeom>
+          <a:noFill/>
+        </p:spPr>
+        <p:txBody>
+          <a:bodyPr wrap="square">
+            <a:spAutoFit/>
+          </a:bodyPr>
+          <a:lstStyle/>
+          <a:p>
+            <a:pPr algn="l"/>
+            <a:r>
+              <a:rPr sz="2600" b="1" dirty="0">
                 <a:solidFill>
                   <a:srgbClr val="202426"/>
                 </a:solidFill>
@@ -3730,23 +3784,23 @@
         </p:nvSpPr>
         <p:spPr>
           <a:xfrm>
-            <a:off x="594360" y="1261872"/>
-            <a:ext cx="10789920" cy="384048"/>
-          </a:xfrm>
-          <a:prstGeom prst="rect">
-            <a:avLst/>
-          </a:prstGeom>
-          <a:noFill/>
-        </p:spPr>
-        <p:txBody>
-          <a:bodyPr wrap="square">
-            <a:spAutoFit/>
-          </a:bodyPr>
-          <a:lstStyle/>
-          <a:p>
-            <a:pPr algn="l"/>
-            <a:r>
-              <a:rPr sz="1250" b="0">
+            <a:off x="731520" y="1399032"/>
+            <a:ext cx="10835640" cy="284693"/>
+          </a:xfrm>
+          <a:prstGeom prst="rect">
+            <a:avLst/>
+          </a:prstGeom>
+          <a:noFill/>
+        </p:spPr>
+        <p:txBody>
+          <a:bodyPr wrap="square">
+            <a:spAutoFit/>
+          </a:bodyPr>
+          <a:lstStyle/>
+          <a:p>
+            <a:pPr algn="l"/>
+            <a:r>
+              <a:rPr sz="1250" b="0" dirty="0">
                 <a:solidFill>
                   <a:srgbClr val="5C6366"/>
                 </a:solidFill>
@@ -3799,6 +3853,7 @@
           <a:lstStyle/>
           <a:p>
             <a:pPr algn="ctr"/>
+            <a:endParaRPr/>
           </a:p>
         </p:txBody>
       </p:sp>
@@ -3914,6 +3969,7 @@
           <a:lstStyle/>
           <a:p>
             <a:pPr algn="ctr"/>
+            <a:endParaRPr/>
           </a:p>
         </p:txBody>
       </p:sp>
@@ -4029,6 +4085,7 @@
           <a:lstStyle/>
           <a:p>
             <a:pPr algn="ctr"/>
+            <a:endParaRPr/>
           </a:p>
         </p:txBody>
       </p:sp>
@@ -4144,6 +4201,7 @@
           <a:lstStyle/>
           <a:p>
             <a:pPr algn="ctr"/>
+            <a:endParaRPr/>
           </a:p>
         </p:txBody>
       </p:sp>
@@ -4261,7 +4319,7 @@
         <p:spPr>
           <a:xfrm>
             <a:off x="731520" y="4617720"/>
-            <a:ext cx="10607040" cy="1170432"/>
+            <a:ext cx="10607040" cy="820738"/>
           </a:xfrm>
           <a:prstGeom prst="rect">
             <a:avLst/>
@@ -4286,7 +4344,8 @@
               </a:defRPr>
             </a:pPr>
             <a:r>
-              <a:t>• Protein bars are often positioned around fitness; CRUNCH+ is positioned around an everyday snack occasion.</a:t>
+              <a:rPr dirty="0"/>
+              <a:t>• Protein bars are often positioned around fitness CRUNCH+ is positioned around an everyday snack occasion.</a:t>
             </a:r>
           </a:p>
           <a:p>
@@ -4302,6 +4361,7 @@
               </a:defRPr>
             </a:pPr>
             <a:r>
+              <a:rPr dirty="0"/>
               <a:t>• Makhana is already familiar, while chana and peanuts make the blend feel more like Indian namkeen than a supplement.</a:t>
             </a:r>
           </a:p>
@@ -4318,6 +4378,7 @@
               </a:defRPr>
             </a:pPr>
             <a:r>
+              <a:rPr dirty="0"/>
               <a:t>• ₹59 keeps the trial price close to existing impulse-snack territory while offering a larger 40 g pack than several low-priced makhana options.</a:t>
             </a:r>
           </a:p>
@@ -4332,28 +4393,46 @@
         <p:spPr>
           <a:xfrm>
             <a:off x="594360" y="6126480"/>
-            <a:ext cx="10881360" cy="292608"/>
-          </a:xfrm>
-          <a:prstGeom prst="rect">
-            <a:avLst/>
-          </a:prstGeom>
-          <a:noFill/>
-        </p:spPr>
-        <p:txBody>
-          <a:bodyPr wrap="square">
-            <a:spAutoFit/>
-          </a:bodyPr>
-          <a:lstStyle/>
-          <a:p>
-            <a:pPr algn="l"/>
-            <a:r>
-              <a:rPr sz="800" b="0">
+            <a:ext cx="10881360" cy="215444"/>
+          </a:xfrm>
+          <a:prstGeom prst="rect">
+            <a:avLst/>
+          </a:prstGeom>
+          <a:noFill/>
+        </p:spPr>
+        <p:txBody>
+          <a:bodyPr wrap="square">
+            <a:spAutoFit/>
+          </a:bodyPr>
+          <a:lstStyle/>
+          <a:p>
+            <a:pPr algn="l"/>
+            <a:r>
+              <a:rPr sz="800" b="0" dirty="0">
                 <a:solidFill>
                   <a:srgbClr val="5C6366"/>
                 </a:solidFill>
                 <a:latin typeface="Aptos"/>
               </a:rPr>
-              <a:t>Sources / assumptions: IBEF/Farmley consumer study, July 2025; IBEF FMCG/healthy-snacking market data, 2026.</a:t>
+              <a:t>Sources / assumptions: IBEF/</a:t>
+            </a:r>
+            <a:r>
+              <a:rPr sz="800" b="0" dirty="0" err="1">
+                <a:solidFill>
+                  <a:srgbClr val="5C6366"/>
+                </a:solidFill>
+                <a:latin typeface="Aptos"/>
+              </a:rPr>
+              <a:t>Farmley</a:t>
+            </a:r>
+            <a:r>
+              <a:rPr sz="800" b="0" dirty="0">
+                <a:solidFill>
+                  <a:srgbClr val="5C6366"/>
+                </a:solidFill>
+                <a:latin typeface="Aptos"/>
+              </a:rPr>
+              <a:t> consumer study, July 2025 IBEF FMCG/healthy-snacking market data, 2026.</a:t>
             </a:r>
           </a:p>
         </p:txBody>
@@ -4402,7 +4481,7 @@
 </file>
 
 <file path=ppt/slides/slide3.xml><?xml version="1.0" encoding="utf-8"?>
-<p:sld xmlns:a="http://schemas.openxmlformats.org/drawingml/2006/main" xmlns:p="http://schemas.openxmlformats.org/presentationml/2006/main" xmlns:r="http://schemas.openxmlformats.org/officeDocument/2006/relationships">
+<p:sld xmlns:a="http://schemas.openxmlformats.org/drawingml/2006/main" xmlns:r="http://schemas.openxmlformats.org/officeDocument/2006/relationships" xmlns:p="http://schemas.openxmlformats.org/presentationml/2006/main">
   <p:cSld>
     <p:bg>
       <p:bgPr>
@@ -4418,7 +4497,14 @@
         <p:cNvGrpSpPr/>
         <p:nvPr/>
       </p:nvGrpSpPr>
-      <p:grpSpPr/>
+      <p:grpSpPr>
+        <a:xfrm>
+          <a:off x="0" y="0"/>
+          <a:ext cx="0" cy="0"/>
+          <a:chOff x="0" y="0"/>
+          <a:chExt cx="0" cy="0"/>
+        </a:xfrm>
+      </p:grpSpPr>
       <p:sp>
         <p:nvSpPr>
           <p:cNvPr id="2" name="TextBox 1"/>
@@ -4531,6 +4617,7 @@
           <a:lstStyle/>
           <a:p>
             <a:pPr algn="ctr"/>
+            <a:endParaRPr/>
           </a:p>
         </p:txBody>
       </p:sp>
@@ -4646,6 +4733,7 @@
           <a:lstStyle/>
           <a:p>
             <a:pPr algn="ctr"/>
+            <a:endParaRPr/>
           </a:p>
         </p:txBody>
       </p:sp>
@@ -4761,6 +4849,7 @@
           <a:lstStyle/>
           <a:p>
             <a:pPr algn="ctr"/>
+            <a:endParaRPr/>
           </a:p>
         </p:txBody>
       </p:sp>
@@ -4876,6 +4965,7 @@
           <a:lstStyle/>
           <a:p>
             <a:pPr algn="ctr"/>
+            <a:endParaRPr/>
           </a:p>
         </p:txBody>
       </p:sp>
@@ -4991,6 +5081,7 @@
           <a:lstStyle/>
           <a:p>
             <a:pPr algn="ctr"/>
+            <a:endParaRPr/>
           </a:p>
         </p:txBody>
       </p:sp>
@@ -5143,28 +5234,28 @@
         <p:spPr>
           <a:xfrm>
             <a:off x="594360" y="6126480"/>
-            <a:ext cx="10881360" cy="292608"/>
-          </a:xfrm>
-          <a:prstGeom prst="rect">
-            <a:avLst/>
-          </a:prstGeom>
-          <a:noFill/>
-        </p:spPr>
-        <p:txBody>
-          <a:bodyPr wrap="square">
-            <a:spAutoFit/>
-          </a:bodyPr>
-          <a:lstStyle/>
-          <a:p>
-            <a:pPr algn="l"/>
-            <a:r>
-              <a:rPr sz="800" b="0">
+            <a:ext cx="10881360" cy="215444"/>
+          </a:xfrm>
+          <a:prstGeom prst="rect">
+            <a:avLst/>
+          </a:prstGeom>
+          <a:noFill/>
+        </p:spPr>
+        <p:txBody>
+          <a:bodyPr wrap="square">
+            <a:spAutoFit/>
+          </a:bodyPr>
+          <a:lstStyle/>
+          <a:p>
+            <a:pPr algn="l"/>
+            <a:r>
+              <a:rPr sz="800" b="0" dirty="0">
                 <a:solidFill>
                   <a:srgbClr val="5C6366"/>
                 </a:solidFill>
                 <a:latin typeface="Aptos"/>
               </a:rPr>
-              <a:t>Sources / assumptions: Target segments are project-defined. FSSAI requires nutrition/health claims to be truthful, substantiated and not misleading; child-focused claims require additional care.</a:t>
+              <a:t>Sources / assumptions: Target segments are project-defined. FSSAI requires nutrition/health claims to be truthful, substantiated and not misleading child-focused claims require additional care.</a:t>
             </a:r>
           </a:p>
         </p:txBody>
@@ -5213,7 +5304,7 @@
 </file>
 
 <file path=ppt/slides/slide4.xml><?xml version="1.0" encoding="utf-8"?>
-<p:sld xmlns:a="http://schemas.openxmlformats.org/drawingml/2006/main" xmlns:p="http://schemas.openxmlformats.org/presentationml/2006/main" xmlns:r="http://schemas.openxmlformats.org/officeDocument/2006/relationships">
+<p:sld xmlns:a="http://schemas.openxmlformats.org/drawingml/2006/main" xmlns:r="http://schemas.openxmlformats.org/officeDocument/2006/relationships" xmlns:p="http://schemas.openxmlformats.org/presentationml/2006/main">
   <p:cSld>
     <p:bg>
       <p:bgPr>
@@ -5229,7 +5320,14 @@
         <p:cNvGrpSpPr/>
         <p:nvPr/>
       </p:nvGrpSpPr>
-      <p:grpSpPr/>
+      <p:grpSpPr>
+        <a:xfrm>
+          <a:off x="0" y="0"/>
+          <a:ext cx="0" cy="0"/>
+          <a:chOff x="0" y="0"/>
+          <a:chExt cx="0" cy="0"/>
+        </a:xfrm>
+      </p:grpSpPr>
       <p:sp>
         <p:nvSpPr>
           <p:cNvPr id="2" name="TextBox 1"/>
@@ -5517,6 +5615,7 @@
           <a:lstStyle/>
           <a:p>
             <a:pPr algn="ctr"/>
+            <a:endParaRPr/>
           </a:p>
         </p:txBody>
       </p:sp>
@@ -5669,28 +5768,28 @@
         <p:spPr>
           <a:xfrm>
             <a:off x="8321040" y="2084831"/>
-            <a:ext cx="3063240" cy="502920"/>
-          </a:xfrm>
-          <a:prstGeom prst="rect">
-            <a:avLst/>
-          </a:prstGeom>
-          <a:noFill/>
-        </p:spPr>
-        <p:txBody>
-          <a:bodyPr wrap="square">
-            <a:spAutoFit/>
-          </a:bodyPr>
-          <a:lstStyle/>
-          <a:p>
-            <a:pPr algn="l"/>
-            <a:r>
-              <a:rPr sz="1120" b="0">
+            <a:ext cx="3063240" cy="264688"/>
+          </a:xfrm>
+          <a:prstGeom prst="rect">
+            <a:avLst/>
+          </a:prstGeom>
+          <a:noFill/>
+        </p:spPr>
+        <p:txBody>
+          <a:bodyPr wrap="square">
+            <a:spAutoFit/>
+          </a:bodyPr>
+          <a:lstStyle/>
+          <a:p>
+            <a:pPr algn="l"/>
+            <a:r>
+              <a:rPr sz="1120" b="0" dirty="0">
                 <a:solidFill>
                   <a:srgbClr val="202426"/>
                 </a:solidFill>
                 <a:latin typeface="Aptos"/>
               </a:rPr>
-              <a:t>40 g blend; broader snack occasion</a:t>
+              <a:t>40 g blend broader snack occasion</a:t>
             </a:r>
           </a:p>
         </p:txBody>
@@ -5737,6 +5836,7 @@
           <a:lstStyle/>
           <a:p>
             <a:pPr algn="ctr"/>
+            <a:endParaRPr/>
           </a:p>
         </p:txBody>
       </p:sp>
@@ -5957,6 +6057,7 @@
           <a:lstStyle/>
           <a:p>
             <a:pPr algn="ctr"/>
+            <a:endParaRPr/>
           </a:p>
         </p:txBody>
       </p:sp>
@@ -6177,6 +6278,7 @@
           <a:lstStyle/>
           <a:p>
             <a:pPr algn="ctr"/>
+            <a:endParaRPr/>
           </a:p>
         </p:txBody>
       </p:sp>
@@ -6469,7 +6571,7 @@
 </file>
 
 <file path=ppt/slides/slide5.xml><?xml version="1.0" encoding="utf-8"?>
-<p:sld xmlns:a="http://schemas.openxmlformats.org/drawingml/2006/main" xmlns:p="http://schemas.openxmlformats.org/presentationml/2006/main" xmlns:r="http://schemas.openxmlformats.org/officeDocument/2006/relationships">
+<p:sld xmlns:a="http://schemas.openxmlformats.org/drawingml/2006/main" xmlns:r="http://schemas.openxmlformats.org/officeDocument/2006/relationships" xmlns:p="http://schemas.openxmlformats.org/presentationml/2006/main">
   <p:cSld>
     <p:bg>
       <p:bgPr>
@@ -6485,7 +6587,14 @@
         <p:cNvGrpSpPr/>
         <p:nvPr/>
       </p:nvGrpSpPr>
-      <p:grpSpPr/>
+      <p:grpSpPr>
+        <a:xfrm>
+          <a:off x="0" y="0"/>
+          <a:ext cx="0" cy="0"/>
+          <a:chOff x="0" y="0"/>
+          <a:chExt cx="0" cy="0"/>
+        </a:xfrm>
+      </p:grpSpPr>
       <p:sp>
         <p:nvSpPr>
           <p:cNvPr id="2" name="TextBox 1"/>
@@ -6633,6 +6742,7 @@
           <a:lstStyle/>
           <a:p>
             <a:pPr algn="ctr"/>
+            <a:endParaRPr/>
           </a:p>
         </p:txBody>
       </p:sp>
@@ -6748,6 +6858,7 @@
           <a:lstStyle/>
           <a:p>
             <a:pPr algn="ctr"/>
+            <a:endParaRPr/>
           </a:p>
         </p:txBody>
       </p:sp>
@@ -6864,6 +6975,7 @@
           <a:lstStyle/>
           <a:p>
             <a:pPr algn="ctr"/>
+            <a:endParaRPr/>
           </a:p>
         </p:txBody>
       </p:sp>
@@ -6980,6 +7092,7 @@
           <a:lstStyle/>
           <a:p>
             <a:pPr algn="ctr"/>
+            <a:endParaRPr/>
           </a:p>
         </p:txBody>
       </p:sp>
@@ -7096,6 +7209,7 @@
           <a:lstStyle/>
           <a:p>
             <a:pPr algn="ctr"/>
+            <a:endParaRPr/>
           </a:p>
         </p:txBody>
       </p:sp>
@@ -7703,28 +7817,27 @@
         <p:spPr>
           <a:xfrm>
             <a:off x="594360" y="6126480"/>
-            <a:ext cx="10881360" cy="292608"/>
-          </a:xfrm>
-          <a:prstGeom prst="rect">
-            <a:avLst/>
-          </a:prstGeom>
-          <a:noFill/>
-        </p:spPr>
-        <p:txBody>
-          <a:bodyPr wrap="square">
-            <a:spAutoFit/>
-          </a:bodyPr>
-          <a:lstStyle/>
-          <a:p>
-            <a:pPr algn="l"/>
-            <a:r>
-              <a:rPr sz="800" b="0">
+            <a:ext cx="10881360" cy="215444"/>
+          </a:xfrm>
+          <a:prstGeom prst="rect">
+            <a:avLst/>
+          </a:prstGeom>
+          <a:noFill/>
+        </p:spPr>
+        <p:txBody>
+          <a:bodyPr wrap="square">
+            <a:spAutoFit/>
+          </a:bodyPr>
+          <a:lstStyle/>
+          <a:p>
+            <a:r>
+              <a:rPr sz="800" b="0" dirty="0">
                 <a:solidFill>
                   <a:srgbClr val="5C6366"/>
                 </a:solidFill>
                 <a:latin typeface="Aptos"/>
               </a:rPr>
-              <a:t>Sources / assumptions: 5% GST is used only as a modelling assumption; actual GST depends on final HSN/classification. Retailer/distributor margins and all cost lines are project assumptions.</a:t>
+              <a:t>Sources / assumptions: 5% GST is used only as a modelling assumption actual GST depends on final HSN/classification. Retailer/distributor margins and all cost lines are project assumptions.</a:t>
             </a:r>
           </a:p>
         </p:txBody>
@@ -7773,7 +7886,7 @@
 </file>
 
 <file path=ppt/slides/slide6.xml><?xml version="1.0" encoding="utf-8"?>
-<p:sld xmlns:a="http://schemas.openxmlformats.org/drawingml/2006/main" xmlns:p="http://schemas.openxmlformats.org/presentationml/2006/main" xmlns:r="http://schemas.openxmlformats.org/officeDocument/2006/relationships">
+<p:sld xmlns:a="http://schemas.openxmlformats.org/drawingml/2006/main" xmlns:r="http://schemas.openxmlformats.org/officeDocument/2006/relationships" xmlns:p="http://schemas.openxmlformats.org/presentationml/2006/main">
   <p:cSld>
     <p:bg>
       <p:bgPr>
@@ -7789,7 +7902,14 @@
         <p:cNvGrpSpPr/>
         <p:nvPr/>
       </p:nvGrpSpPr>
-      <p:grpSpPr/>
+      <p:grpSpPr>
+        <a:xfrm>
+          <a:off x="0" y="0"/>
+          <a:ext cx="0" cy="0"/>
+          <a:chOff x="0" y="0"/>
+          <a:chExt cx="0" cy="0"/>
+        </a:xfrm>
+      </p:grpSpPr>
       <p:sp>
         <p:nvSpPr>
           <p:cNvPr id="2" name="TextBox 1"/>
@@ -7902,6 +8022,7 @@
           <a:lstStyle/>
           <a:p>
             <a:pPr algn="ctr"/>
+            <a:endParaRPr/>
           </a:p>
         </p:txBody>
       </p:sp>
@@ -8019,6 +8140,7 @@
           <a:lstStyle/>
           <a:p>
             <a:pPr algn="ctr"/>
+            <a:endParaRPr/>
           </a:p>
         </p:txBody>
       </p:sp>
@@ -8135,6 +8257,7 @@
           <a:lstStyle/>
           <a:p>
             <a:pPr algn="ctr"/>
+            <a:endParaRPr/>
           </a:p>
         </p:txBody>
       </p:sp>
@@ -8251,6 +8374,7 @@
           <a:lstStyle/>
           <a:p>
             <a:pPr algn="ctr"/>
+            <a:endParaRPr/>
           </a:p>
         </p:txBody>
       </p:sp>
@@ -8440,28 +8564,28 @@
         <p:spPr>
           <a:xfrm>
             <a:off x="594360" y="6126480"/>
-            <a:ext cx="10881360" cy="292608"/>
-          </a:xfrm>
-          <a:prstGeom prst="rect">
-            <a:avLst/>
-          </a:prstGeom>
-          <a:noFill/>
-        </p:spPr>
-        <p:txBody>
-          <a:bodyPr wrap="square">
-            <a:spAutoFit/>
-          </a:bodyPr>
-          <a:lstStyle/>
-          <a:p>
-            <a:pPr algn="l"/>
-            <a:r>
-              <a:rPr sz="800" b="0">
+            <a:ext cx="10881360" cy="215444"/>
+          </a:xfrm>
+          <a:prstGeom prst="rect">
+            <a:avLst/>
+          </a:prstGeom>
+          <a:noFill/>
+        </p:spPr>
+        <p:txBody>
+          <a:bodyPr wrap="square">
+            <a:spAutoFit/>
+          </a:bodyPr>
+          <a:lstStyle/>
+          <a:p>
+            <a:pPr algn="l"/>
+            <a:r>
+              <a:rPr sz="800" b="0" dirty="0">
                 <a:solidFill>
                   <a:srgbClr val="5C6366"/>
                 </a:solidFill>
                 <a:latin typeface="Aptos"/>
               </a:rPr>
-              <a:t>Sources / assumptions: NIQ/IBEF reports e-commerce at about 18% of FMCG sales across India's top eight metros in Oct–Dec 2025; city sequence is a project inference.</a:t>
+              <a:t>Sources / assumptions: NIQ/IBEF reports e-commerce at about 18% of FMCG sales across India's top eight metros in Oct–Dec 2025 city sequence is a project inference.</a:t>
             </a:r>
           </a:p>
         </p:txBody>
@@ -8510,7 +8634,7 @@
 </file>
 
 <file path=ppt/slides/slide7.xml><?xml version="1.0" encoding="utf-8"?>
-<p:sld xmlns:a="http://schemas.openxmlformats.org/drawingml/2006/main" xmlns:p="http://schemas.openxmlformats.org/presentationml/2006/main" xmlns:r="http://schemas.openxmlformats.org/officeDocument/2006/relationships">
+<p:sld xmlns:a="http://schemas.openxmlformats.org/drawingml/2006/main" xmlns:r="http://schemas.openxmlformats.org/officeDocument/2006/relationships" xmlns:p="http://schemas.openxmlformats.org/presentationml/2006/main">
   <p:cSld>
     <p:bg>
       <p:bgPr>
@@ -8526,7 +8650,14 @@
         <p:cNvGrpSpPr/>
         <p:nvPr/>
       </p:nvGrpSpPr>
-      <p:grpSpPr/>
+      <p:grpSpPr>
+        <a:xfrm>
+          <a:off x="0" y="0"/>
+          <a:ext cx="0" cy="0"/>
+          <a:chOff x="0" y="0"/>
+          <a:chExt cx="0" cy="0"/>
+        </a:xfrm>
+      </p:grpSpPr>
       <p:sp>
         <p:nvSpPr>
           <p:cNvPr id="2" name="TextBox 1"/>
@@ -8672,6 +8803,7 @@
           <a:lstStyle/>
           <a:p>
             <a:pPr algn="ctr"/>
+            <a:endParaRPr/>
           </a:p>
         </p:txBody>
       </p:sp>
@@ -8785,6 +8917,7 @@
           <a:lstStyle/>
           <a:p>
             <a:pPr algn="ctr"/>
+            <a:endParaRPr/>
           </a:p>
         </p:txBody>
       </p:sp>
@@ -8898,6 +9031,7 @@
           <a:lstStyle/>
           <a:p>
             <a:pPr algn="ctr"/>
+            <a:endParaRPr/>
           </a:p>
         </p:txBody>
       </p:sp>
@@ -9011,6 +9145,7 @@
           <a:lstStyle/>
           <a:p>
             <a:pPr algn="ctr"/>
+            <a:endParaRPr/>
           </a:p>
         </p:txBody>
       </p:sp>
@@ -9124,6 +9259,7 @@
           <a:lstStyle/>
           <a:p>
             <a:pPr algn="ctr"/>
+            <a:endParaRPr/>
           </a:p>
         </p:txBody>
       </p:sp>
@@ -9237,6 +9373,7 @@
           <a:lstStyle/>
           <a:p>
             <a:pPr algn="ctr"/>
+            <a:endParaRPr/>
           </a:p>
         </p:txBody>
       </p:sp>
@@ -9350,6 +9487,7 @@
           <a:lstStyle/>
           <a:p>
             <a:pPr algn="ctr"/>
+            <a:endParaRPr/>
           </a:p>
         </p:txBody>
       </p:sp>
@@ -9463,6 +9601,7 @@
           <a:lstStyle/>
           <a:p>
             <a:pPr algn="ctr"/>
+            <a:endParaRPr/>
           </a:p>
         </p:txBody>
       </p:sp>
@@ -9615,28 +9754,46 @@
         <p:spPr>
           <a:xfrm>
             <a:off x="731520" y="5971032"/>
-            <a:ext cx="9966960" cy="384048"/>
-          </a:xfrm>
-          <a:prstGeom prst="rect">
-            <a:avLst/>
-          </a:prstGeom>
-          <a:noFill/>
-        </p:spPr>
-        <p:txBody>
-          <a:bodyPr wrap="square">
-            <a:spAutoFit/>
-          </a:bodyPr>
-          <a:lstStyle/>
-          <a:p>
-            <a:pPr algn="l"/>
-            <a:r>
-              <a:rPr sz="1080" b="0">
+            <a:ext cx="9966960" cy="258532"/>
+          </a:xfrm>
+          <a:prstGeom prst="rect">
+            <a:avLst/>
+          </a:prstGeom>
+          <a:noFill/>
+        </p:spPr>
+        <p:txBody>
+          <a:bodyPr wrap="square">
+            <a:spAutoFit/>
+          </a:bodyPr>
+          <a:lstStyle/>
+          <a:p>
+            <a:pPr algn="l"/>
+            <a:r>
+              <a:rPr sz="1080" b="0" dirty="0">
                 <a:solidFill>
                   <a:srgbClr val="5C6366"/>
                 </a:solidFill>
                 <a:latin typeface="Aptos"/>
               </a:rPr>
-              <a:t>Show real moments: gym → office → school/college → family tea time. The message is not “be healthy”; it is “swap one ordinary snack for a better one.”</a:t>
+              <a:t>Show real moments: gym → office → school/college → family tea time. The message is not “be </a:t>
+            </a:r>
+            <a:r>
+              <a:rPr sz="1080" b="0" dirty="0" err="1">
+                <a:solidFill>
+                  <a:srgbClr val="5C6366"/>
+                </a:solidFill>
+                <a:latin typeface="Aptos"/>
+              </a:rPr>
+              <a:t>healthy”it</a:t>
+            </a:r>
+            <a:r>
+              <a:rPr sz="1080" b="0" dirty="0">
+                <a:solidFill>
+                  <a:srgbClr val="5C6366"/>
+                </a:solidFill>
+                <a:latin typeface="Aptos"/>
+              </a:rPr>
+              <a:t> is “swap one ordinary snack for a better one.”</a:t>
             </a:r>
           </a:p>
         </p:txBody>
@@ -9685,7 +9842,7 @@
 </file>
 
 <file path=ppt/slides/slide8.xml><?xml version="1.0" encoding="utf-8"?>
-<p:sld xmlns:a="http://schemas.openxmlformats.org/drawingml/2006/main" xmlns:p="http://schemas.openxmlformats.org/presentationml/2006/main" xmlns:r="http://schemas.openxmlformats.org/officeDocument/2006/relationships">
+<p:sld xmlns:a="http://schemas.openxmlformats.org/drawingml/2006/main" xmlns:r="http://schemas.openxmlformats.org/officeDocument/2006/relationships" xmlns:p="http://schemas.openxmlformats.org/presentationml/2006/main">
   <p:cSld>
     <p:bg>
       <p:bgPr>
@@ -9701,7 +9858,14 @@
         <p:cNvGrpSpPr/>
         <p:nvPr/>
       </p:nvGrpSpPr>
-      <p:grpSpPr/>
+      <p:grpSpPr>
+        <a:xfrm>
+          <a:off x="0" y="0"/>
+          <a:ext cx="0" cy="0"/>
+          <a:chOff x="0" y="0"/>
+          <a:chExt cx="0" cy="0"/>
+        </a:xfrm>
+      </p:grpSpPr>
       <p:sp>
         <p:nvSpPr>
           <p:cNvPr id="2" name="TextBox 1"/>
@@ -9814,6 +9978,7 @@
           <a:lstStyle/>
           <a:p>
             <a:pPr algn="ctr"/>
+            <a:endParaRPr/>
           </a:p>
         </p:txBody>
       </p:sp>
@@ -9930,6 +10095,7 @@
           <a:lstStyle/>
           <a:p>
             <a:pPr algn="ctr"/>
+            <a:endParaRPr/>
           </a:p>
         </p:txBody>
       </p:sp>
@@ -10046,6 +10212,7 @@
           <a:lstStyle/>
           <a:p>
             <a:pPr algn="ctr"/>
+            <a:endParaRPr/>
           </a:p>
         </p:txBody>
       </p:sp>
@@ -10162,6 +10329,7 @@
           <a:lstStyle/>
           <a:p>
             <a:pPr algn="ctr"/>
+            <a:endParaRPr/>
           </a:p>
         </p:txBody>
       </p:sp>
@@ -10366,28 +10534,72 @@
         <p:spPr>
           <a:xfrm>
             <a:off x="594360" y="6126480"/>
-            <a:ext cx="10881360" cy="292608"/>
-          </a:xfrm>
-          <a:prstGeom prst="rect">
-            <a:avLst/>
-          </a:prstGeom>
-          <a:noFill/>
-        </p:spPr>
-        <p:txBody>
-          <a:bodyPr wrap="square">
-            <a:spAutoFit/>
-          </a:bodyPr>
-          <a:lstStyle/>
-          <a:p>
-            <a:pPr algn="l"/>
-            <a:r>
-              <a:rPr sz="800" b="0">
+            <a:ext cx="10881360" cy="215444"/>
+          </a:xfrm>
+          <a:prstGeom prst="rect">
+            <a:avLst/>
+          </a:prstGeom>
+          <a:noFill/>
+        </p:spPr>
+        <p:txBody>
+          <a:bodyPr wrap="square">
+            <a:spAutoFit/>
+          </a:bodyPr>
+          <a:lstStyle/>
+          <a:p>
+            <a:r>
+              <a:rPr sz="800" b="0" dirty="0">
                 <a:solidFill>
                   <a:srgbClr val="5C6366"/>
                 </a:solidFill>
                 <a:latin typeface="Aptos"/>
               </a:rPr>
-              <a:t>Sources / assumptions: FSSAI Advertising &amp; Claims regulations; live competitor listings; IBEF/Farmley healthy-snacking study. Targets and strategy are project assumptions.</a:t>
+              <a:t>Sources / assumptions: FSSAI Advertising &amp; Claims regulations </a:t>
+            </a:r>
+            <a:r>
+              <a:rPr lang="en-IN" sz="800" b="0" dirty="0">
+                <a:solidFill>
+                  <a:srgbClr val="5C6366"/>
+                </a:solidFill>
+                <a:latin typeface="Aptos"/>
+              </a:rPr>
+              <a:t>l</a:t>
+            </a:r>
+            <a:r>
+              <a:rPr sz="800" b="0" dirty="0" err="1">
+                <a:solidFill>
+                  <a:srgbClr val="5C6366"/>
+                </a:solidFill>
+                <a:latin typeface="Aptos"/>
+              </a:rPr>
+              <a:t>ive</a:t>
+            </a:r>
+            <a:r>
+              <a:rPr sz="800" b="0" dirty="0">
+                <a:solidFill>
+                  <a:srgbClr val="5C6366"/>
+                </a:solidFill>
+                <a:latin typeface="Aptos"/>
+              </a:rPr>
+              <a:t> competitor listings IBEF/</a:t>
+            </a:r>
+            <a:r>
+              <a:rPr sz="800" b="0" dirty="0" err="1">
+                <a:solidFill>
+                  <a:srgbClr val="5C6366"/>
+                </a:solidFill>
+                <a:latin typeface="Aptos"/>
+              </a:rPr>
+              <a:t>Farmley</a:t>
+            </a:r>
+            <a:r>
+              <a:rPr sz="800" b="0" dirty="0">
+                <a:solidFill>
+                  <a:srgbClr val="5C6366"/>
+                </a:solidFill>
+                <a:latin typeface="Aptos"/>
+              </a:rPr>
+              <a:t> healthy-snacking study. Targets and strategy are project assumptions.</a:t>
             </a:r>
           </a:p>
         </p:txBody>
